--- a/media/exports/reports/2025-12/calls.pptx
+++ b/media/exports/reports/2025-12/calls.pptx
@@ -235,25 +235,25 @@
                 <c:formatCode>#,##0;[Red](#,##0)</c:formatCode>
                 <c:ptCount val="7"/>
                 <c:pt idx="0">
-                  <c:v>79</c:v>
+                  <c:v>87</c:v>
                 </c:pt>
                 <c:pt idx="1">
-                  <c:v>152</c:v>
+                  <c:v>157</c:v>
                 </c:pt>
                 <c:pt idx="2">
-                  <c:v>124</c:v>
+                  <c:v>126</c:v>
                 </c:pt>
                 <c:pt idx="3">
-                  <c:v>91</c:v>
+                  <c:v>86</c:v>
                 </c:pt>
                 <c:pt idx="4">
-                  <c:v>110</c:v>
+                  <c:v>112</c:v>
                 </c:pt>
                 <c:pt idx="5">
-                  <c:v>62</c:v>
+                  <c:v>93</c:v>
                 </c:pt>
                 <c:pt idx="6">
-                  <c:v>107</c:v>
+                  <c:v>115</c:v>
                 </c:pt>
               </c:numCache>
             </c:numRef>
@@ -317,7 +317,7 @@
       <c:valAx>
         <c:axId val="-2113994440"/>
         <c:scaling>
-          <c:max val="174.79999999999998"/>
+          <c:max val="180.54999999999998"/>
           <c:min val="0.0"/>
         </c:scaling>
         <c:delete/>
@@ -456,49 +456,49 @@
                 <c:formatCode>#,##0;[Red](#,##0)</c:formatCode>
                 <c:ptCount val="15"/>
                 <c:pt idx="0">
-                  <c:v>659</c:v>
+                  <c:v>685</c:v>
                 </c:pt>
                 <c:pt idx="1">
-                  <c:v>655</c:v>
+                  <c:v>633</c:v>
                 </c:pt>
                 <c:pt idx="2">
+                  <c:v>684</c:v>
+                </c:pt>
+                <c:pt idx="3">
+                  <c:v>690</c:v>
+                </c:pt>
+                <c:pt idx="4">
+                  <c:v>664</c:v>
+                </c:pt>
+                <c:pt idx="5">
                   <c:v>685</c:v>
                 </c:pt>
-                <c:pt idx="3">
-                  <c:v>714</c:v>
-                </c:pt>
-                <c:pt idx="4">
-                  <c:v>683</c:v>
-                </c:pt>
-                <c:pt idx="5">
-                  <c:v>725</c:v>
-                </c:pt>
                 <c:pt idx="6">
-                  <c:v>620</c:v>
+                  <c:v>629</c:v>
                 </c:pt>
                 <c:pt idx="7">
-                  <c:v>754</c:v>
+                  <c:v>724</c:v>
                 </c:pt>
                 <c:pt idx="8">
-                  <c:v>783</c:v>
+                  <c:v>820</c:v>
                 </c:pt>
                 <c:pt idx="9">
-                  <c:v>871</c:v>
+                  <c:v>909</c:v>
                 </c:pt>
                 <c:pt idx="10">
-                  <c:v>852</c:v>
+                  <c:v>826</c:v>
                 </c:pt>
                 <c:pt idx="11">
-                  <c:v>781</c:v>
+                  <c:v>756</c:v>
                 </c:pt>
                 <c:pt idx="12">
-                  <c:v>792</c:v>
+                  <c:v>770</c:v>
                 </c:pt>
                 <c:pt idx="13">
-                  <c:v>675</c:v>
+                  <c:v>746</c:v>
                 </c:pt>
                 <c:pt idx="14">
-                  <c:v>725</c:v>
+                  <c:v>776</c:v>
                 </c:pt>
               </c:numCache>
             </c:numRef>
@@ -1072,7 +1072,7 @@
           <a:lstStyle/>
           <a:p>
             <a:r>
-              <a:t>When do calls for help come in, and are we there to answer?. Calls for help, December: 725; Answered while staffed, December: 82.7%; Calls outside staffed hours, December: 53.8%; Median wait when answered, December: 79 sec. 725 calls for help came in during December. While the line was staffed, 82.7% were answered (target 90.0%); 53.8% of all calls came outside staffed hours and went to voicemail. The busiest time was 5 to 8pm (152 calls). 152 calls came between 5 and 8pm, when no-one is on the line. 58 callers hung up waiting while the line was staffed.</a:t>
+              <a:t>When do calls for help come in, and are we there to answer?. Calls for help, December: 776; Answered while staffed, December: 79.0%; Calls outside staffed hours, December: 54.0%; Median wait when answered, December: 71 sec. 776 calls for help came in during December. While the line was staffed, 79.0% were answered (target 90.0%); 54.0% of all calls came outside staffed hours and went to voicemail. The busiest time was 5 to 8pm (157 calls). 157 calls came between 5 and 8pm, when no-one is on the line. 75 callers hung up waiting while the line was staffed.</a:t>
             </a:r>
           </a:p>
         </p:txBody>
@@ -4557,7 +4557,7 @@
                 </a:solidFill>
                 <a:latin typeface="Roboto"/>
               </a:rPr>
-              <a:t>Data retrieved 2pm, Tue 6 Oct 2026 · Generated 8 Oct 2026, 6:42pm · Sample data · Made with Python (python-pptx)</a:t>
+              <a:t>Data retrieved 2pm, Tue 6 Oct 2026 · Generated 8 Oct 2026, 11:41pm · Sample data · Made with Python (python-pptx)</a:t>
             </a:r>
           </a:p>
         </p:txBody>
@@ -4903,7 +4903,7 @@
                 </a:solidFill>
                 <a:latin typeface="Roboto"/>
               </a:rPr>
-              <a:t>725</a:t>
+              <a:t>776</a:t>
             </a:r>
           </a:p>
         </p:txBody>
@@ -4942,7 +4942,7 @@
                 </a:solidFill>
                 <a:latin typeface="Roboto"/>
               </a:rPr>
-              <a:t>November 675</a:t>
+              <a:t>November 746</a:t>
             </a:r>
           </a:p>
         </p:txBody>
@@ -5069,7 +5069,7 @@
                 </a:solidFill>
                 <a:latin typeface="Roboto"/>
               </a:rPr>
-              <a:t>82.7%</a:t>
+              <a:t>79.0%</a:t>
             </a:r>
           </a:p>
         </p:txBody>
@@ -5235,7 +5235,7 @@
                 </a:solidFill>
                 <a:latin typeface="Roboto"/>
               </a:rPr>
-              <a:t>53.8%</a:t>
+              <a:t>54.0%</a:t>
             </a:r>
           </a:p>
         </p:txBody>
@@ -5274,7 +5274,7 @@
                 </a:solidFill>
                 <a:latin typeface="Roboto"/>
               </a:rPr>
-              <a:t>390 calls to voicemail</a:t>
+              <a:t>419 calls to voicemail</a:t>
             </a:r>
           </a:p>
         </p:txBody>
@@ -5401,7 +5401,7 @@
                 </a:solidFill>
                 <a:latin typeface="Roboto"/>
               </a:rPr>
-              <a:t>79 sec</a:t>
+              <a:t>71 sec</a:t>
             </a:r>
           </a:p>
         </p:txBody>
@@ -5440,7 +5440,7 @@
                 </a:solidFill>
                 <a:latin typeface="Roboto"/>
               </a:rPr>
-              <a:t>277 answered calls</a:t>
+              <a:t>282 answered calls</a:t>
             </a:r>
           </a:p>
         </p:txBody>
@@ -5585,7 +5585,7 @@
                 </a:solidFill>
                 <a:latin typeface="Roboto"/>
               </a:rPr>
-              <a:t>725 calls for help came in during December. While the line was staffed, 82.7% were answered (target 90.0%); 53.8% of all calls came outside staffed hours and went to voicemail. The busiest time was 5 to 8pm (152 calls).</a:t>
+              <a:t>776 calls for help came in during December. While the line was staffed, 79.0% were answered (target 90.0%); 54.0% of all calls came outside staffed hours and went to voicemail. The busiest time was 5 to 8pm (157 calls).</a:t>
             </a:r>
           </a:p>
         </p:txBody>
@@ -5712,7 +5712,7 @@
                 </a:solidFill>
                 <a:latin typeface="Roboto"/>
               </a:rPr>
-              <a:t>152 calls came between 5 and 8pm, when no-one is on the line. 58 callers hung up waiting while the line was staffed.</a:t>
+              <a:t>157 calls came between 5 and 8pm, when no-one is on the line. 75 callers hung up waiting while the line was staffed.</a:t>
             </a:r>
           </a:p>
         </p:txBody>
@@ -5790,7 +5790,7 @@
                 </a:solidFill>
                 <a:latin typeface="Roboto"/>
               </a:rPr>
-              <a:t>Data retrieved 2pm, Tue 6 Oct 2026 · Generated 8 Oct 2026, 6:42pm · Sample data · Made with Python (python-pptx)</a:t>
+              <a:t>Data retrieved 2pm, Tue 6 Oct 2026 · Generated 8 Oct 2026, 11:41pm · Sample data · Made with Python (python-pptx)</a:t>
             </a:r>
           </a:p>
         </p:txBody>
@@ -6105,7 +6105,7 @@
                 </a:solidFill>
                 <a:latin typeface="Roboto"/>
               </a:rPr>
-              <a:t>Data retrieved 2pm, Tue 6 Oct 2026 · Generated 8 Oct 2026, 6:42pm · Sample data · Made with Python (python-pptx)</a:t>
+              <a:t>Data retrieved 2pm, Tue 6 Oct 2026 · Generated 8 Oct 2026, 11:41pm · Sample data · Made with Python (python-pptx)</a:t>
             </a:r>
           </a:p>
         </p:txBody>

--- a/media/exports/reports/2025-12/calls.pptx
+++ b/media/exports/reports/2025-12/calls.pptx
@@ -1002,7 +1002,7 @@
           <a:lstStyle/>
           <a:p>
             <a:r>
-              <a:t>When do calls for help come in, and are we there to answer?. Sample Community Services Ltd. Period: December 2025. Every call to the help line: when it came in, whether someone answered, and how long the caller waited. The line is staffed 8:30am to 5pm on working days.</a:t>
+              <a:t>When do calls for help come in, and are we there to answer?. Sample Community Services Ltd. Period: December 2025. In short: 776 calls in December: 79.0% answered while staffed (target 90.0%); 54.0% came outside staffed hours. Every call to the help line: when it came in, whether someone answered, and how long the caller waited. The line is staffed 8:30am to 5pm on working days.</a:t>
             </a:r>
           </a:p>
         </p:txBody>
@@ -4367,7 +4367,7 @@
         <p:spPr>
           <a:xfrm>
             <a:off x="457200" y="3703320"/>
-            <a:ext cx="11277295" cy="535940"/>
+            <a:ext cx="11277295" cy="758190"/>
           </a:xfrm>
           <a:prstGeom prst="rect">
             <a:avLst/>
@@ -4392,7 +4392,7 @@
                 </a:solidFill>
                 <a:latin typeface="Roboto"/>
               </a:rPr>
-              <a:t>Period: December 2025. Every call to the help line: when it came in, whether someone answered, and how long the caller waited. The line is staffed 8:30am to 5pm on working days.</a:t>
+              <a:t>Period: December 2025. In short: 776 calls in December: 79.0% answered while staffed (target 90.0%); 54.0% came outside staffed hours. Every call to the help line: when it came in, whether someone answered, and how long the caller waited. The line is staffed 8:30am to 5pm on working days.</a:t>
             </a:r>
           </a:p>
         </p:txBody>
@@ -4405,7 +4405,7 @@
         </p:nvSpPr>
         <p:spPr>
           <a:xfrm>
-            <a:off x="457200" y="4330700"/>
+            <a:off x="457200" y="4552950"/>
             <a:ext cx="11277295" cy="1097280"/>
           </a:xfrm>
           <a:prstGeom prst="rect">
@@ -4557,7 +4557,7 @@
                 </a:solidFill>
                 <a:latin typeface="Roboto"/>
               </a:rPr>
-              <a:t>Data retrieved 2pm, Tue 6 Oct 2026 · Generated 8 Oct 2026, 11:41pm · Sample data · Made with Python (python-pptx)</a:t>
+              <a:t>Data retrieved 2pm, Tue 6 Oct 2026 · Generated 10 Oct 2026, 9:55pm · Sample data · Made with Python (python-pptx)</a:t>
             </a:r>
           </a:p>
         </p:txBody>
@@ -5790,7 +5790,7 @@
                 </a:solidFill>
                 <a:latin typeface="Roboto"/>
               </a:rPr>
-              <a:t>Data retrieved 2pm, Tue 6 Oct 2026 · Generated 8 Oct 2026, 11:41pm · Sample data · Made with Python (python-pptx)</a:t>
+              <a:t>Data retrieved 2pm, Tue 6 Oct 2026 · Generated 10 Oct 2026, 9:55pm · Sample data · Made with Python (python-pptx)</a:t>
             </a:r>
           </a:p>
         </p:txBody>
@@ -6105,7 +6105,7 @@
                 </a:solidFill>
                 <a:latin typeface="Roboto"/>
               </a:rPr>
-              <a:t>Data retrieved 2pm, Tue 6 Oct 2026 · Generated 8 Oct 2026, 11:41pm · Sample data · Made with Python (python-pptx)</a:t>
+              <a:t>Data retrieved 2pm, Tue 6 Oct 2026 · Generated 10 Oct 2026, 9:55pm · Sample data · Made with Python (python-pptx)</a:t>
             </a:r>
           </a:p>
         </p:txBody>
